--- a/docs/presentation/CustomTees_Leadership_Demo.pptx
+++ b/docs/presentation/CustomTees_Leadership_Demo.pptx
@@ -1927,7 +1927,7 @@
                 <a:ea typeface="Calibri" pitchFamily="34" charset="-122"/>
                 <a:cs typeface="Calibri" pitchFamily="34" charset="-120"/>
               </a:rPr>
-              <a:t>Christy Jason</a:t>
+              <a:t>Christy</a:t>
             </a:r>
             <a:endParaRPr lang="en-US" sz="1300" dirty="0"/>
           </a:p>
